--- a/KickoffPresentation.pptx
+++ b/KickoffPresentation.pptx
@@ -5,15 +5,14 @@
     <p:sldMasterId id="2147483648" r:id="rId1"/>
   </p:sldMasterIdLst>
   <p:notesMasterIdLst>
-    <p:notesMasterId r:id="rId5"/>
+    <p:notesMasterId r:id="rId4"/>
   </p:notesMasterIdLst>
   <p:handoutMasterIdLst>
-    <p:handoutMasterId r:id="rId6"/>
+    <p:handoutMasterId r:id="rId5"/>
   </p:handoutMasterIdLst>
   <p:sldIdLst>
-    <p:sldId id="337" r:id="rId2"/>
-    <p:sldId id="412" r:id="rId3"/>
-    <p:sldId id="408" r:id="rId4"/>
+    <p:sldId id="412" r:id="rId2"/>
+    <p:sldId id="408" r:id="rId3"/>
   </p:sldIdLst>
   <p:sldSz cx="12192000" cy="6858000"/>
   <p:notesSz cx="6858000" cy="9144000"/>
@@ -666,90 +665,6 @@
   <p:cSld>
     <p:spTree>
       <p:nvGrpSpPr>
-        <p:cNvPr id="1" name=""/>
-        <p:cNvGrpSpPr/>
-        <p:nvPr/>
-      </p:nvGrpSpPr>
-      <p:grpSpPr>
-        <a:xfrm>
-          <a:off x="0" y="0"/>
-          <a:ext cx="0" cy="0"/>
-          <a:chOff x="0" y="0"/>
-          <a:chExt cx="0" cy="0"/>
-        </a:xfrm>
-      </p:grpSpPr>
-      <p:sp>
-        <p:nvSpPr>
-          <p:cNvPr id="2" name="Slide Image Placeholder 1"/>
-          <p:cNvSpPr>
-            <a:spLocks noGrp="1" noRot="1" noChangeAspect="1"/>
-          </p:cNvSpPr>
-          <p:nvPr>
-            <p:ph type="sldImg"/>
-          </p:nvPr>
-        </p:nvSpPr>
-        <p:spPr/>
-      </p:sp>
-      <p:sp>
-        <p:nvSpPr>
-          <p:cNvPr id="3" name="Notes Placeholder 2"/>
-          <p:cNvSpPr>
-            <a:spLocks noGrp="1"/>
-          </p:cNvSpPr>
-          <p:nvPr>
-            <p:ph type="body" idx="1"/>
-          </p:nvPr>
-        </p:nvSpPr>
-        <p:spPr/>
-        <p:txBody>
-          <a:bodyPr/>
-          <a:lstStyle/>
-          <a:p>
-            <a:endParaRPr lang="en-US"/>
-          </a:p>
-        </p:txBody>
-      </p:sp>
-      <p:sp>
-        <p:nvSpPr>
-          <p:cNvPr id="4" name="Slide Number Placeholder 3"/>
-          <p:cNvSpPr>
-            <a:spLocks noGrp="1"/>
-          </p:cNvSpPr>
-          <p:nvPr>
-            <p:ph type="sldNum" sz="quarter" idx="5"/>
-          </p:nvPr>
-        </p:nvSpPr>
-        <p:spPr/>
-        <p:txBody>
-          <a:bodyPr/>
-          <a:lstStyle/>
-          <a:p>
-            <a:fld id="{5E5535E0-CBDD-BC4C-BD4F-9919692E8FCF}" type="slidenum">
-              <a:rPr lang="en-US" smtClean="0"/>
-              <a:t>1</a:t>
-            </a:fld>
-            <a:endParaRPr lang="en-US"/>
-          </a:p>
-        </p:txBody>
-      </p:sp>
-    </p:spTree>
-    <p:extLst>
-      <p:ext uri="{BB962C8B-B14F-4D97-AF65-F5344CB8AC3E}">
-        <p14:creationId xmlns:p14="http://schemas.microsoft.com/office/powerpoint/2010/main" val="2530661036"/>
-      </p:ext>
-    </p:extLst>
-  </p:cSld>
-  <p:clrMapOvr>
-    <a:masterClrMapping/>
-  </p:clrMapOvr>
-</p:notes>
-</file>
-
-<file path=ppt/notesSlides/notesSlide2.xml><?xml version="1.0" encoding="utf-8"?>
-<p:notes xmlns:a="http://schemas.openxmlformats.org/drawingml/2006/main" xmlns:r="http://schemas.openxmlformats.org/officeDocument/2006/relationships" xmlns:p="http://schemas.openxmlformats.org/presentationml/2006/main">
-  <p:cSld>
-    <p:spTree>
-      <p:nvGrpSpPr>
         <p:cNvPr id="1" name="">
           <a:extLst>
             <a:ext uri="{FF2B5EF4-FFF2-40B4-BE49-F238E27FC236}">
@@ -834,7 +749,7 @@
           <a:p>
             <a:fld id="{5E5535E0-CBDD-BC4C-BD4F-9919692E8FCF}" type="slidenum">
               <a:rPr lang="en-US" smtClean="0"/>
-              <a:t>2</a:t>
+              <a:t>1</a:t>
             </a:fld>
             <a:endParaRPr lang="en-US"/>
           </a:p>
@@ -5929,168 +5844,6 @@
   <p:cSld>
     <p:spTree>
       <p:nvGrpSpPr>
-        <p:cNvPr id="1" name=""/>
-        <p:cNvGrpSpPr/>
-        <p:nvPr/>
-      </p:nvGrpSpPr>
-      <p:grpSpPr>
-        <a:xfrm>
-          <a:off x="0" y="0"/>
-          <a:ext cx="0" cy="0"/>
-          <a:chOff x="0" y="0"/>
-          <a:chExt cx="0" cy="0"/>
-        </a:xfrm>
-      </p:grpSpPr>
-      <p:sp>
-        <p:nvSpPr>
-          <p:cNvPr id="3" name="Title 2">
-            <a:extLst>
-              <a:ext uri="{FF2B5EF4-FFF2-40B4-BE49-F238E27FC236}">
-                <a16:creationId xmlns:a16="http://schemas.microsoft.com/office/drawing/2014/main" id="{C0F9CCAA-7E30-BB9F-A84B-72FE07648DED}"/>
-              </a:ext>
-            </a:extLst>
-          </p:cNvPr>
-          <p:cNvSpPr>
-            <a:spLocks noGrp="1"/>
-          </p:cNvSpPr>
-          <p:nvPr>
-            <p:ph type="title"/>
-          </p:nvPr>
-        </p:nvSpPr>
-        <p:spPr>
-          <a:xfrm>
-            <a:off x="675153" y="839754"/>
-            <a:ext cx="10327464" cy="2093569"/>
-          </a:xfrm>
-        </p:spPr>
-        <p:txBody>
-          <a:bodyPr/>
-          <a:lstStyle/>
-          <a:p>
-            <a:r>
-              <a:rPr lang="en-US" sz="2800" dirty="0"/>
-              <a:t>Visual Autoregressive Models for Inverse Design</a:t>
-            </a:r>
-          </a:p>
-        </p:txBody>
-      </p:sp>
-      <p:sp>
-        <p:nvSpPr>
-          <p:cNvPr id="4" name="Subtitle 3">
-            <a:extLst>
-              <a:ext uri="{FF2B5EF4-FFF2-40B4-BE49-F238E27FC236}">
-                <a16:creationId xmlns:a16="http://schemas.microsoft.com/office/drawing/2014/main" id="{365C7E20-F2AF-6C89-DC75-E72D094CCEAA}"/>
-              </a:ext>
-            </a:extLst>
-          </p:cNvPr>
-          <p:cNvSpPr>
-            <a:spLocks noGrp="1"/>
-          </p:cNvSpPr>
-          <p:nvPr>
-            <p:ph type="subTitle" idx="1"/>
-          </p:nvPr>
-        </p:nvSpPr>
-        <p:spPr>
-          <a:xfrm>
-            <a:off x="675153" y="3130649"/>
-            <a:ext cx="8622960" cy="1157572"/>
-          </a:xfrm>
-        </p:spPr>
-        <p:txBody>
-          <a:bodyPr>
-            <a:normAutofit/>
-          </a:bodyPr>
-          <a:lstStyle/>
-          <a:p>
-            <a:r>
-              <a:rPr lang="en-US" sz="2000" dirty="0"/>
-              <a:t>Student: Hossein Kazemi</a:t>
-            </a:r>
-          </a:p>
-          <a:p>
-            <a:r>
-              <a:rPr lang="en-US" sz="2000" dirty="0"/>
-              <a:t>Advisor: Prof. Hadi Meidani</a:t>
-            </a:r>
-          </a:p>
-        </p:txBody>
-      </p:sp>
-      <p:sp>
-        <p:nvSpPr>
-          <p:cNvPr id="5" name="Text Placeholder 4">
-            <a:extLst>
-              <a:ext uri="{FF2B5EF4-FFF2-40B4-BE49-F238E27FC236}">
-                <a16:creationId xmlns:a16="http://schemas.microsoft.com/office/drawing/2014/main" id="{F21B9422-0C33-3E36-A22D-8B8733F2B01C}"/>
-              </a:ext>
-            </a:extLst>
-          </p:cNvPr>
-          <p:cNvSpPr>
-            <a:spLocks noGrp="1"/>
-          </p:cNvSpPr>
-          <p:nvPr>
-            <p:ph type="body" sz="quarter" idx="11"/>
-          </p:nvPr>
-        </p:nvSpPr>
-        <p:spPr/>
-        <p:txBody>
-          <a:bodyPr/>
-          <a:lstStyle/>
-          <a:p>
-            <a:r>
-              <a:rPr lang="en-US" dirty="0"/>
-              <a:t>03/10/2026</a:t>
-            </a:r>
-          </a:p>
-        </p:txBody>
-      </p:sp>
-      <p:sp>
-        <p:nvSpPr>
-          <p:cNvPr id="2" name="Slide Number Placeholder 1">
-            <a:extLst>
-              <a:ext uri="{FF2B5EF4-FFF2-40B4-BE49-F238E27FC236}">
-                <a16:creationId xmlns:a16="http://schemas.microsoft.com/office/drawing/2014/main" id="{1DEDCD20-D654-C334-09C1-093CF6B653FA}"/>
-              </a:ext>
-            </a:extLst>
-          </p:cNvPr>
-          <p:cNvSpPr>
-            <a:spLocks noGrp="1"/>
-          </p:cNvSpPr>
-          <p:nvPr>
-            <p:ph type="sldNum" sz="quarter" idx="10"/>
-          </p:nvPr>
-        </p:nvSpPr>
-        <p:spPr/>
-        <p:txBody>
-          <a:bodyPr/>
-          <a:lstStyle/>
-          <a:p>
-            <a:fld id="{2385DA76-2DD3-144A-9C84-6B8D9531DA2D}" type="slidenum">
-              <a:rPr lang="en-US" smtClean="0"/>
-              <a:pPr/>
-              <a:t>1</a:t>
-            </a:fld>
-            <a:endParaRPr lang="en-US" dirty="0"/>
-          </a:p>
-        </p:txBody>
-      </p:sp>
-    </p:spTree>
-    <p:extLst>
-      <p:ext uri="{BB962C8B-B14F-4D97-AF65-F5344CB8AC3E}">
-        <p14:creationId xmlns:p14="http://schemas.microsoft.com/office/powerpoint/2010/main" val="1409773183"/>
-      </p:ext>
-    </p:extLst>
-  </p:cSld>
-  <p:clrMapOvr>
-    <a:masterClrMapping/>
-  </p:clrMapOvr>
-</p:sld>
-</file>
-
-<file path=ppt/slides/slide2.xml><?xml version="1.0" encoding="utf-8"?>
-<p:sld xmlns:a="http://schemas.openxmlformats.org/drawingml/2006/main" xmlns:r="http://schemas.openxmlformats.org/officeDocument/2006/relationships" xmlns:p="http://schemas.openxmlformats.org/presentationml/2006/main">
-  <p:cSld>
-    <p:spTree>
-      <p:nvGrpSpPr>
         <p:cNvPr id="1" name="">
           <a:extLst>
             <a:ext uri="{FF2B5EF4-FFF2-40B4-BE49-F238E27FC236}">
@@ -6137,7 +5890,7 @@
           <a:p>
             <a:fld id="{2385DA76-2DD3-144A-9C84-6B8D9531DA2D}" type="slidenum">
               <a:rPr lang="en-US" smtClean="0"/>
-              <a:t>2</a:t>
+              <a:t>1</a:t>
             </a:fld>
             <a:endParaRPr lang="en-US" dirty="0"/>
           </a:p>
@@ -6531,7 +6284,7 @@
 </p:sld>
 </file>
 
-<file path=ppt/slides/slide3.xml><?xml version="1.0" encoding="utf-8"?>
+<file path=ppt/slides/slide2.xml><?xml version="1.0" encoding="utf-8"?>
 <p:sld xmlns:a="http://schemas.openxmlformats.org/drawingml/2006/main" xmlns:r="http://schemas.openxmlformats.org/officeDocument/2006/relationships" xmlns:p="http://schemas.openxmlformats.org/presentationml/2006/main">
   <p:cSld>
     <p:spTree>
@@ -6577,7 +6330,7 @@
           <a:p>
             <a:fld id="{2385DA76-2DD3-144A-9C84-6B8D9531DA2D}" type="slidenum">
               <a:rPr lang="en-US" smtClean="0"/>
-              <a:t>3</a:t>
+              <a:t>2</a:t>
             </a:fld>
             <a:endParaRPr lang="en-US"/>
           </a:p>
